--- a/RTwP_RPG 최종발표자료.pptx
+++ b/RTwP_RPG 최종발표자료.pptx
@@ -8730,7 +8730,7 @@
         </p:spPr>
         <p:txBody>
           <a:bodyPr wrap="square" lIns="25400" tIns="25400" rIns="25400" bIns="25400" rtlCol="0" anchor="t">
-            <a:normAutofit/>
+            <a:normAutofit lnSpcReduction="10000"/>
           </a:bodyPr>
           <a:lstStyle/>
           <a:p>
@@ -12454,6 +12454,17 @@
               <a:buNone/>
             </a:pPr>
             <a:r>
+              <a:rPr lang="en-US" sz="1425" dirty="0" err="1">
+                <a:solidFill>
+                  <a:srgbClr val="8A9AB8"/>
+                </a:solidFill>
+                <a:latin typeface="Noto Sans KR" pitchFamily="34" charset="0"/>
+                <a:ea typeface="Noto Sans KR" pitchFamily="34" charset="-122"/>
+                <a:cs typeface="Noto Sans KR" pitchFamily="34" charset="-120"/>
+              </a:rPr>
+              <a:t>AnimatorUpdateMode.Manual</a:t>
+            </a:r>
+            <a:r>
               <a:rPr lang="en-US" sz="1425" dirty="0">
                 <a:solidFill>
                   <a:srgbClr val="8A9AB8"/>
@@ -12462,7 +12473,18 @@
                 <a:ea typeface="Noto Sans KR" pitchFamily="34" charset="-122"/>
                 <a:cs typeface="Noto Sans KR" pitchFamily="34" charset="-120"/>
               </a:rPr>
-              <a:t>AnimatorUpdateMode.Manual → Unity 6 미동작 · 깜박임</a:t>
+              <a:t> →</a:t>
+            </a:r>
+            <a:r>
+              <a:rPr lang="ko-KR" altLang="en-US" sz="1425" dirty="0">
+                <a:solidFill>
+                  <a:srgbClr val="8A9AB8"/>
+                </a:solidFill>
+                <a:latin typeface="Noto Sans KR" pitchFamily="34" charset="0"/>
+                <a:ea typeface="Noto Sans KR" pitchFamily="34" charset="-122"/>
+                <a:cs typeface="Noto Sans KR" pitchFamily="34" charset="-120"/>
+              </a:rPr>
+              <a:t> 정지되지 않는 애니메이션</a:t>
             </a:r>
             <a:endParaRPr lang="en-US" sz="1425" dirty="0"/>
           </a:p>
@@ -16782,7 +16804,7 @@
         </p:spPr>
         <p:txBody>
           <a:bodyPr wrap="square" lIns="25400" tIns="25400" rIns="25400" bIns="25400" rtlCol="0" anchor="t">
-            <a:normAutofit fontScale="92500"/>
+            <a:normAutofit lnSpcReduction="10000"/>
           </a:bodyPr>
           <a:lstStyle/>
           <a:p>
@@ -17517,6 +17539,17 @@
               <a:buNone/>
             </a:pPr>
             <a:r>
+              <a:rPr lang="en-US" sz="1200" dirty="0" err="1">
+                <a:solidFill>
+                  <a:srgbClr val="8A9AB8"/>
+                </a:solidFill>
+                <a:latin typeface="Noto Sans KR" pitchFamily="34" charset="0"/>
+                <a:ea typeface="Noto Sans KR" pitchFamily="34" charset="-122"/>
+                <a:cs typeface="Noto Sans KR" pitchFamily="34" charset="-120"/>
+              </a:rPr>
+              <a:t>수동</a:t>
+            </a:r>
+            <a:r>
               <a:rPr lang="en-US" sz="1200" dirty="0">
                 <a:solidFill>
                   <a:srgbClr val="8A9AB8"/>
@@ -17525,7 +17558,29 @@
                 <a:ea typeface="Noto Sans KR" pitchFamily="34" charset="-122"/>
                 <a:cs typeface="Noto Sans KR" pitchFamily="34" charset="-120"/>
               </a:rPr>
-              <a:t>수동 검증 항목</a:t>
+              <a:t> </a:t>
+            </a:r>
+            <a:r>
+              <a:rPr lang="ko-KR" altLang="en-US" sz="1200" dirty="0">
+                <a:solidFill>
+                  <a:srgbClr val="8A9AB8"/>
+                </a:solidFill>
+                <a:latin typeface="Noto Sans KR" pitchFamily="34" charset="0"/>
+                <a:ea typeface="Noto Sans KR" pitchFamily="34" charset="-122"/>
+                <a:cs typeface="Noto Sans KR" pitchFamily="34" charset="-120"/>
+              </a:rPr>
+              <a:t>통합</a:t>
+            </a:r>
+            <a:r>
+              <a:rPr lang="en-US" sz="1200" dirty="0">
+                <a:solidFill>
+                  <a:srgbClr val="8A9AB8"/>
+                </a:solidFill>
+                <a:latin typeface="Noto Sans KR" pitchFamily="34" charset="0"/>
+                <a:ea typeface="Noto Sans KR" pitchFamily="34" charset="-122"/>
+                <a:cs typeface="Noto Sans KR" pitchFamily="34" charset="-120"/>
+              </a:rPr>
+              <a:t> 검증 항목</a:t>
             </a:r>
             <a:endParaRPr lang="en-US" sz="1200" dirty="0"/>
           </a:p>
@@ -19063,552 +19118,198 @@
           </a:p>
         </p:txBody>
       </p:sp>
-      <p:sp>
-        <p:nvSpPr>
-          <p:cNvPr id="6" name="Shape 4"/>
-          <p:cNvSpPr/>
-          <p:nvPr/>
-        </p:nvSpPr>
-        <p:spPr>
-          <a:xfrm>
-            <a:off x="914400" y="2190750"/>
-            <a:ext cx="5308600" cy="7210425"/>
-          </a:xfrm>
-          <a:prstGeom prst="roundRect">
-            <a:avLst>
-              <a:gd name="adj" fmla="val 1435"/>
-            </a:avLst>
-          </a:prstGeom>
-          <a:solidFill>
-            <a:srgbClr val="1A2236"/>
-          </a:solidFill>
-          <a:ln/>
-        </p:spPr>
-        <p:txBody>
-          <a:bodyPr/>
-          <a:lstStyle/>
-          <a:p>
-            <a:endParaRPr lang="ko-KR" altLang="en-US"/>
-          </a:p>
-        </p:txBody>
-      </p:sp>
-      <p:sp>
-        <p:nvSpPr>
-          <p:cNvPr id="7" name="Shape 5"/>
-          <p:cNvSpPr/>
-          <p:nvPr/>
-        </p:nvSpPr>
-        <p:spPr>
-          <a:xfrm>
-            <a:off x="914400" y="2190750"/>
-            <a:ext cx="5308600" cy="38100"/>
-          </a:xfrm>
-          <a:prstGeom prst="rect">
-            <a:avLst/>
-          </a:prstGeom>
-          <a:solidFill>
-            <a:srgbClr val="D97757"/>
-          </a:solidFill>
-          <a:ln/>
-        </p:spPr>
-        <p:txBody>
-          <a:bodyPr/>
-          <a:lstStyle/>
-          <a:p>
-            <a:endParaRPr lang="ko-KR" altLang="en-US"/>
-          </a:p>
-        </p:txBody>
-      </p:sp>
-      <p:sp>
-        <p:nvSpPr>
-          <p:cNvPr id="8" name="Text 6"/>
-          <p:cNvSpPr/>
-          <p:nvPr/>
-        </p:nvSpPr>
-        <p:spPr>
-          <a:xfrm>
-            <a:off x="1276350" y="2647950"/>
-            <a:ext cx="5043170" cy="419100"/>
-          </a:xfrm>
-          <a:prstGeom prst="rect">
-            <a:avLst/>
-          </a:prstGeom>
-          <a:noFill/>
-          <a:ln/>
-        </p:spPr>
-        <p:txBody>
-          <a:bodyPr wrap="square" lIns="25400" tIns="25400" rIns="25400" bIns="25400" rtlCol="0" anchor="t">
-            <a:normAutofit/>
-          </a:bodyPr>
-          <a:lstStyle/>
-          <a:p>
-            <a:pPr marL="0" indent="0" algn="l">
-              <a:buNone/>
-            </a:pPr>
-            <a:r>
-              <a:rPr lang="en-US" sz="2250" dirty="0">
-                <a:solidFill>
-                  <a:srgbClr val="D97757"/>
-                </a:solidFill>
-                <a:latin typeface="JetBrains Mono" pitchFamily="34" charset="0"/>
-                <a:ea typeface="JetBrains Mono" pitchFamily="34" charset="-122"/>
-                <a:cs typeface="JetBrains Mono" pitchFamily="34" charset="-120"/>
-              </a:rPr>
-              <a:t>01</a:t>
-            </a:r>
-            <a:endParaRPr lang="en-US" sz="2250" dirty="0"/>
-          </a:p>
-        </p:txBody>
-      </p:sp>
-      <p:sp>
-        <p:nvSpPr>
-          <p:cNvPr id="9" name="Text 7"/>
-          <p:cNvSpPr/>
-          <p:nvPr/>
-        </p:nvSpPr>
-        <p:spPr>
-          <a:xfrm>
-            <a:off x="1276350" y="3257550"/>
-            <a:ext cx="5043170" cy="406400"/>
-          </a:xfrm>
-          <a:prstGeom prst="rect">
-            <a:avLst/>
-          </a:prstGeom>
-          <a:noFill/>
-          <a:ln/>
-        </p:spPr>
-        <p:txBody>
-          <a:bodyPr wrap="square" lIns="25400" tIns="25400" rIns="25400" bIns="25400" rtlCol="0" anchor="t">
-            <a:normAutofit lnSpcReduction="10000"/>
-          </a:bodyPr>
-          <a:lstStyle/>
-          <a:p>
-            <a:pPr marL="0" indent="0" algn="l">
-              <a:buNone/>
-            </a:pPr>
-            <a:r>
-              <a:rPr lang="en-US" sz="2400" b="1" dirty="0">
-                <a:solidFill>
-                  <a:srgbClr val="F0EADB"/>
-                </a:solidFill>
-                <a:latin typeface="Noto Sans KR" pitchFamily="34" charset="0"/>
-                <a:ea typeface="Noto Sans KR" pitchFamily="34" charset="-122"/>
-                <a:cs typeface="Noto Sans KR" pitchFamily="34" charset="-120"/>
-              </a:rPr>
-              <a:t>포트폴리오</a:t>
-            </a:r>
-            <a:endParaRPr lang="en-US" sz="2400" dirty="0"/>
-          </a:p>
-        </p:txBody>
-      </p:sp>
-      <p:sp>
-        <p:nvSpPr>
-          <p:cNvPr id="10" name="Text 8"/>
-          <p:cNvSpPr/>
-          <p:nvPr/>
-        </p:nvSpPr>
-        <p:spPr>
-          <a:xfrm>
-            <a:off x="1276350" y="3816350"/>
-            <a:ext cx="4722241" cy="368102"/>
-          </a:xfrm>
-          <a:prstGeom prst="rect">
-            <a:avLst/>
-          </a:prstGeom>
-          <a:noFill/>
-          <a:ln/>
-        </p:spPr>
-        <p:txBody>
-          <a:bodyPr wrap="square" lIns="25400" tIns="25400" rIns="25400" bIns="25400" rtlCol="0" anchor="t">
-            <a:normAutofit fontScale="92500" lnSpcReduction="10000"/>
-          </a:bodyPr>
-          <a:lstStyle/>
-          <a:p>
-            <a:pPr marL="0" indent="0" algn="l">
-              <a:lnSpc>
-                <a:spcPct val="165000"/>
-              </a:lnSpc>
-              <a:buNone/>
-            </a:pPr>
-            <a:r>
-              <a:rPr lang="en-US" sz="1575" dirty="0">
-                <a:solidFill>
-                  <a:srgbClr val="8A9AB8"/>
-                </a:solidFill>
-                <a:latin typeface="Noto Sans KR" pitchFamily="34" charset="0"/>
-                <a:ea typeface="Noto Sans KR" pitchFamily="34" charset="-122"/>
-                <a:cs typeface="Noto Sans KR" pitchFamily="34" charset="-120"/>
-              </a:rPr>
-              <a:t>완성된 게임으로 GitHub 공개 배포 — 즉시 시연 가능</a:t>
-            </a:r>
-            <a:endParaRPr lang="en-US" sz="1575" dirty="0"/>
-          </a:p>
-        </p:txBody>
-      </p:sp>
-      <p:sp>
-        <p:nvSpPr>
-          <p:cNvPr id="11" name="Shape 9"/>
-          <p:cNvSpPr/>
-          <p:nvPr/>
-        </p:nvSpPr>
-        <p:spPr>
-          <a:xfrm>
-            <a:off x="6489700" y="2190750"/>
-            <a:ext cx="5308600" cy="7210425"/>
-          </a:xfrm>
-          <a:prstGeom prst="roundRect">
-            <a:avLst>
-              <a:gd name="adj" fmla="val 1435"/>
-            </a:avLst>
-          </a:prstGeom>
-          <a:solidFill>
-            <a:srgbClr val="1A2236"/>
-          </a:solidFill>
-          <a:ln/>
-        </p:spPr>
-        <p:txBody>
-          <a:bodyPr/>
-          <a:lstStyle/>
-          <a:p>
-            <a:endParaRPr lang="ko-KR" altLang="en-US"/>
-          </a:p>
-        </p:txBody>
-      </p:sp>
-      <p:sp>
-        <p:nvSpPr>
-          <p:cNvPr id="12" name="Shape 10"/>
-          <p:cNvSpPr/>
-          <p:nvPr/>
-        </p:nvSpPr>
-        <p:spPr>
-          <a:xfrm>
-            <a:off x="6489700" y="2190750"/>
-            <a:ext cx="5308600" cy="38100"/>
-          </a:xfrm>
-          <a:prstGeom prst="rect">
-            <a:avLst/>
-          </a:prstGeom>
-          <a:solidFill>
-            <a:srgbClr val="E8B84B"/>
-          </a:solidFill>
-          <a:ln/>
-        </p:spPr>
-        <p:txBody>
-          <a:bodyPr/>
-          <a:lstStyle/>
-          <a:p>
-            <a:endParaRPr lang="ko-KR" altLang="en-US"/>
-          </a:p>
-        </p:txBody>
-      </p:sp>
-      <p:sp>
-        <p:nvSpPr>
-          <p:cNvPr id="13" name="Text 11"/>
-          <p:cNvSpPr/>
-          <p:nvPr/>
-        </p:nvSpPr>
-        <p:spPr>
-          <a:xfrm>
-            <a:off x="6851650" y="2647950"/>
-            <a:ext cx="5043170" cy="419100"/>
-          </a:xfrm>
-          <a:prstGeom prst="rect">
-            <a:avLst/>
-          </a:prstGeom>
-          <a:noFill/>
-          <a:ln/>
-        </p:spPr>
-        <p:txBody>
-          <a:bodyPr wrap="square" lIns="25400" tIns="25400" rIns="25400" bIns="25400" rtlCol="0" anchor="t">
-            <a:normAutofit/>
-          </a:bodyPr>
-          <a:lstStyle/>
-          <a:p>
-            <a:pPr marL="0" indent="0" algn="l">
-              <a:buNone/>
-            </a:pPr>
-            <a:r>
-              <a:rPr lang="en-US" sz="2250" dirty="0">
-                <a:solidFill>
-                  <a:srgbClr val="E8B84B"/>
-                </a:solidFill>
-                <a:latin typeface="JetBrains Mono" pitchFamily="34" charset="0"/>
-                <a:ea typeface="JetBrains Mono" pitchFamily="34" charset="-122"/>
-                <a:cs typeface="JetBrains Mono" pitchFamily="34" charset="-120"/>
-              </a:rPr>
-              <a:t>02</a:t>
-            </a:r>
-            <a:endParaRPr lang="en-US" sz="2250" dirty="0"/>
-          </a:p>
-        </p:txBody>
-      </p:sp>
-      <p:sp>
-        <p:nvSpPr>
-          <p:cNvPr id="14" name="Text 12"/>
-          <p:cNvSpPr/>
-          <p:nvPr/>
-        </p:nvSpPr>
-        <p:spPr>
-          <a:xfrm>
-            <a:off x="6851650" y="3257550"/>
-            <a:ext cx="5043170" cy="406400"/>
-          </a:xfrm>
-          <a:prstGeom prst="rect">
-            <a:avLst/>
-          </a:prstGeom>
-          <a:noFill/>
-          <a:ln/>
-        </p:spPr>
-        <p:txBody>
-          <a:bodyPr wrap="square" lIns="25400" tIns="25400" rIns="25400" bIns="25400" rtlCol="0" anchor="t">
-            <a:normAutofit lnSpcReduction="10000"/>
-          </a:bodyPr>
-          <a:lstStyle/>
-          <a:p>
-            <a:pPr marL="0" indent="0" algn="l">
-              <a:buNone/>
-            </a:pPr>
-            <a:r>
-              <a:rPr lang="en-US" sz="2400" b="1" dirty="0">
-                <a:solidFill>
-                  <a:srgbClr val="F0EADB"/>
-                </a:solidFill>
-                <a:latin typeface="Noto Sans KR" pitchFamily="34" charset="0"/>
-                <a:ea typeface="Noto Sans KR" pitchFamily="34" charset="-122"/>
-                <a:cs typeface="Noto Sans KR" pitchFamily="34" charset="-120"/>
-              </a:rPr>
-              <a:t>엔진 이식</a:t>
-            </a:r>
-            <a:endParaRPr lang="en-US" sz="2400" dirty="0"/>
-          </a:p>
-        </p:txBody>
-      </p:sp>
-      <p:sp>
-        <p:nvSpPr>
-          <p:cNvPr id="15" name="Text 13"/>
-          <p:cNvSpPr/>
-          <p:nvPr/>
-        </p:nvSpPr>
-        <p:spPr>
-          <a:xfrm>
-            <a:off x="6851650" y="3816350"/>
-            <a:ext cx="4722241" cy="368102"/>
-          </a:xfrm>
-          <a:prstGeom prst="rect">
-            <a:avLst/>
-          </a:prstGeom>
-          <a:noFill/>
-          <a:ln/>
-        </p:spPr>
-        <p:txBody>
-          <a:bodyPr wrap="square" lIns="25400" tIns="25400" rIns="25400" bIns="25400" rtlCol="0" anchor="t">
-            <a:normAutofit fontScale="92500" lnSpcReduction="10000"/>
-          </a:bodyPr>
-          <a:lstStyle/>
-          <a:p>
-            <a:pPr marL="0" indent="0" algn="l">
-              <a:lnSpc>
-                <a:spcPct val="165000"/>
-              </a:lnSpc>
-              <a:buNone/>
-            </a:pPr>
-            <a:r>
-              <a:rPr lang="en-US" sz="1575" dirty="0">
-                <a:solidFill>
-                  <a:srgbClr val="8A9AB8"/>
-                </a:solidFill>
-                <a:latin typeface="Noto Sans KR" pitchFamily="34" charset="0"/>
-                <a:ea typeface="Noto Sans KR" pitchFamily="34" charset="-122"/>
-                <a:cs typeface="Noto Sans KR" pitchFamily="34" charset="-120"/>
-              </a:rPr>
-              <a:t>RTwP 틱 엔진을 다른 규모의 RPG에 그대로 적용 가능</a:t>
-            </a:r>
-            <a:endParaRPr lang="en-US" sz="1575" dirty="0"/>
-          </a:p>
-        </p:txBody>
-      </p:sp>
-      <p:sp>
-        <p:nvSpPr>
-          <p:cNvPr id="16" name="Shape 14"/>
-          <p:cNvSpPr/>
-          <p:nvPr/>
-        </p:nvSpPr>
-        <p:spPr>
-          <a:xfrm>
-            <a:off x="12065001" y="2190750"/>
-            <a:ext cx="5308600" cy="7210425"/>
-          </a:xfrm>
-          <a:prstGeom prst="roundRect">
-            <a:avLst>
-              <a:gd name="adj" fmla="val 1435"/>
-            </a:avLst>
-          </a:prstGeom>
-          <a:solidFill>
-            <a:srgbClr val="1A2236"/>
-          </a:solidFill>
-          <a:ln/>
-        </p:spPr>
-        <p:txBody>
-          <a:bodyPr/>
-          <a:lstStyle/>
-          <a:p>
-            <a:endParaRPr lang="ko-KR" altLang="en-US"/>
-          </a:p>
-        </p:txBody>
-      </p:sp>
-      <p:sp>
-        <p:nvSpPr>
-          <p:cNvPr id="17" name="Shape 15"/>
-          <p:cNvSpPr/>
-          <p:nvPr/>
-        </p:nvSpPr>
-        <p:spPr>
-          <a:xfrm>
-            <a:off x="12065001" y="2190750"/>
-            <a:ext cx="5308600" cy="38100"/>
-          </a:xfrm>
-          <a:prstGeom prst="rect">
-            <a:avLst/>
-          </a:prstGeom>
-          <a:solidFill>
-            <a:srgbClr val="5BC8A8"/>
-          </a:solidFill>
-          <a:ln/>
-        </p:spPr>
-        <p:txBody>
-          <a:bodyPr/>
-          <a:lstStyle/>
-          <a:p>
-            <a:endParaRPr lang="ko-KR" altLang="en-US"/>
-          </a:p>
-        </p:txBody>
-      </p:sp>
-      <p:sp>
-        <p:nvSpPr>
-          <p:cNvPr id="18" name="Text 16"/>
-          <p:cNvSpPr/>
-          <p:nvPr/>
-        </p:nvSpPr>
-        <p:spPr>
-          <a:xfrm>
-            <a:off x="12426951" y="2647950"/>
-            <a:ext cx="5043170" cy="419100"/>
-          </a:xfrm>
-          <a:prstGeom prst="rect">
-            <a:avLst/>
-          </a:prstGeom>
-          <a:noFill/>
-          <a:ln/>
-        </p:spPr>
-        <p:txBody>
-          <a:bodyPr wrap="square" lIns="25400" tIns="25400" rIns="25400" bIns="25400" rtlCol="0" anchor="t">
-            <a:normAutofit/>
-          </a:bodyPr>
-          <a:lstStyle/>
-          <a:p>
-            <a:pPr marL="0" indent="0" algn="l">
-              <a:buNone/>
-            </a:pPr>
-            <a:r>
-              <a:rPr lang="en-US" sz="2250" dirty="0">
-                <a:solidFill>
-                  <a:srgbClr val="5BC8A8"/>
-                </a:solidFill>
-                <a:latin typeface="JetBrains Mono" pitchFamily="34" charset="0"/>
-                <a:ea typeface="JetBrains Mono" pitchFamily="34" charset="-122"/>
-                <a:cs typeface="JetBrains Mono" pitchFamily="34" charset="-120"/>
-              </a:rPr>
-              <a:t>03</a:t>
-            </a:r>
-            <a:endParaRPr lang="en-US" sz="2250" dirty="0"/>
-          </a:p>
-        </p:txBody>
-      </p:sp>
-      <p:sp>
-        <p:nvSpPr>
-          <p:cNvPr id="19" name="Text 17"/>
-          <p:cNvSpPr/>
-          <p:nvPr/>
-        </p:nvSpPr>
-        <p:spPr>
-          <a:xfrm>
-            <a:off x="12426951" y="3257550"/>
-            <a:ext cx="5043170" cy="406400"/>
-          </a:xfrm>
-          <a:prstGeom prst="rect">
-            <a:avLst/>
-          </a:prstGeom>
-          <a:noFill/>
-          <a:ln/>
-        </p:spPr>
-        <p:txBody>
-          <a:bodyPr wrap="square" lIns="25400" tIns="25400" rIns="25400" bIns="25400" rtlCol="0" anchor="t">
-            <a:normAutofit lnSpcReduction="10000"/>
-          </a:bodyPr>
-          <a:lstStyle/>
-          <a:p>
-            <a:pPr marL="0" indent="0" algn="l">
-              <a:buNone/>
-            </a:pPr>
-            <a:r>
-              <a:rPr lang="en-US" sz="2400" b="1" dirty="0">
-                <a:solidFill>
-                  <a:srgbClr val="F0EADB"/>
-                </a:solidFill>
-                <a:latin typeface="Noto Sans KR" pitchFamily="34" charset="0"/>
-                <a:ea typeface="Noto Sans KR" pitchFamily="34" charset="-122"/>
-                <a:cs typeface="Noto Sans KR" pitchFamily="34" charset="-120"/>
-              </a:rPr>
-              <a:t>AI 엔지니어링 역량</a:t>
-            </a:r>
-            <a:endParaRPr lang="en-US" sz="2400" dirty="0"/>
-          </a:p>
-        </p:txBody>
-      </p:sp>
-      <p:sp>
-        <p:nvSpPr>
-          <p:cNvPr id="20" name="Text 18"/>
-          <p:cNvSpPr/>
-          <p:nvPr/>
-        </p:nvSpPr>
-        <p:spPr>
-          <a:xfrm>
-            <a:off x="12426951" y="3816350"/>
-            <a:ext cx="4722241" cy="698103"/>
-          </a:xfrm>
-          <a:prstGeom prst="rect">
-            <a:avLst/>
-          </a:prstGeom>
-          <a:noFill/>
-          <a:ln/>
-        </p:spPr>
-        <p:txBody>
-          <a:bodyPr wrap="square" lIns="25400" tIns="25400" rIns="25400" bIns="25400" rtlCol="0" anchor="t">
-            <a:normAutofit fontScale="92500" lnSpcReduction="20000"/>
-          </a:bodyPr>
-          <a:lstStyle/>
-          <a:p>
-            <a:pPr marL="0" indent="0" algn="l">
-              <a:lnSpc>
-                <a:spcPct val="165000"/>
-              </a:lnSpc>
-              <a:buNone/>
-            </a:pPr>
-            <a:r>
-              <a:rPr lang="en-US" sz="1575" dirty="0">
-                <a:solidFill>
-                  <a:srgbClr val="8A9AB8"/>
-                </a:solidFill>
-                <a:latin typeface="Noto Sans KR" pitchFamily="34" charset="0"/>
-                <a:ea typeface="Noto Sans KR" pitchFamily="34" charset="-122"/>
-                <a:cs typeface="Noto Sans KR" pitchFamily="34" charset="-120"/>
-              </a:rPr>
-              <a:t>복잡한 전투 디버깅 · AI 에이전트 엔지니어링 경험을 다른 프로젝트에도 그대로 적용</a:t>
-            </a:r>
-            <a:endParaRPr lang="en-US" sz="1575" dirty="0"/>
-          </a:p>
-        </p:txBody>
-      </p:sp>
+      <p:grpSp>
+        <p:nvGrpSpPr>
+          <p:cNvPr id="24" name="그룹 23">
+            <a:extLst>
+              <a:ext uri="{FF2B5EF4-FFF2-40B4-BE49-F238E27FC236}">
+                <a16:creationId xmlns:a16="http://schemas.microsoft.com/office/drawing/2014/main" id="{705DBAE0-27B4-9B16-77D9-3DE63FA09F2A}"/>
+              </a:ext>
+            </a:extLst>
+          </p:cNvPr>
+          <p:cNvGrpSpPr/>
+          <p:nvPr/>
+        </p:nvGrpSpPr>
+        <p:grpSpPr>
+          <a:xfrm>
+            <a:off x="6441440" y="2228850"/>
+            <a:ext cx="5405120" cy="7210425"/>
+            <a:chOff x="12065001" y="2190750"/>
+            <a:chExt cx="5405120" cy="7210425"/>
+          </a:xfrm>
+        </p:grpSpPr>
+        <p:sp>
+          <p:nvSpPr>
+            <p:cNvPr id="16" name="Shape 14"/>
+            <p:cNvSpPr/>
+            <p:nvPr/>
+          </p:nvSpPr>
+          <p:spPr>
+            <a:xfrm>
+              <a:off x="12065001" y="2190750"/>
+              <a:ext cx="5308600" cy="7210425"/>
+            </a:xfrm>
+            <a:prstGeom prst="roundRect">
+              <a:avLst>
+                <a:gd name="adj" fmla="val 1435"/>
+              </a:avLst>
+            </a:prstGeom>
+            <a:solidFill>
+              <a:srgbClr val="1A2236"/>
+            </a:solidFill>
+            <a:ln/>
+          </p:spPr>
+          <p:txBody>
+            <a:bodyPr/>
+            <a:lstStyle/>
+            <a:p>
+              <a:endParaRPr lang="ko-KR" altLang="en-US"/>
+            </a:p>
+          </p:txBody>
+        </p:sp>
+        <p:sp>
+          <p:nvSpPr>
+            <p:cNvPr id="17" name="Shape 15"/>
+            <p:cNvSpPr/>
+            <p:nvPr/>
+          </p:nvSpPr>
+          <p:spPr>
+            <a:xfrm>
+              <a:off x="12065001" y="2190750"/>
+              <a:ext cx="5308600" cy="38100"/>
+            </a:xfrm>
+            <a:prstGeom prst="rect">
+              <a:avLst/>
+            </a:prstGeom>
+            <a:solidFill>
+              <a:srgbClr val="5BC8A8"/>
+            </a:solidFill>
+            <a:ln/>
+          </p:spPr>
+          <p:txBody>
+            <a:bodyPr/>
+            <a:lstStyle/>
+            <a:p>
+              <a:endParaRPr lang="ko-KR" altLang="en-US"/>
+            </a:p>
+          </p:txBody>
+        </p:sp>
+        <p:sp>
+          <p:nvSpPr>
+            <p:cNvPr id="18" name="Text 16"/>
+            <p:cNvSpPr/>
+            <p:nvPr/>
+          </p:nvSpPr>
+          <p:spPr>
+            <a:xfrm>
+              <a:off x="12426951" y="2647950"/>
+              <a:ext cx="5043170" cy="419100"/>
+            </a:xfrm>
+            <a:prstGeom prst="rect">
+              <a:avLst/>
+            </a:prstGeom>
+            <a:noFill/>
+            <a:ln/>
+          </p:spPr>
+          <p:txBody>
+            <a:bodyPr wrap="square" lIns="25400" tIns="25400" rIns="25400" bIns="25400" rtlCol="0" anchor="t">
+              <a:normAutofit/>
+            </a:bodyPr>
+            <a:lstStyle/>
+            <a:p>
+              <a:pPr marL="0" indent="0" algn="l">
+                <a:buNone/>
+              </a:pPr>
+              <a:endParaRPr lang="en-US" sz="2250" dirty="0"/>
+            </a:p>
+          </p:txBody>
+        </p:sp>
+        <p:sp>
+          <p:nvSpPr>
+            <p:cNvPr id="19" name="Text 17"/>
+            <p:cNvSpPr/>
+            <p:nvPr/>
+          </p:nvSpPr>
+          <p:spPr>
+            <a:xfrm>
+              <a:off x="12426951" y="3257550"/>
+              <a:ext cx="5043170" cy="406400"/>
+            </a:xfrm>
+            <a:prstGeom prst="rect">
+              <a:avLst/>
+            </a:prstGeom>
+            <a:noFill/>
+            <a:ln/>
+          </p:spPr>
+          <p:txBody>
+            <a:bodyPr wrap="square" lIns="25400" tIns="25400" rIns="25400" bIns="25400" rtlCol="0" anchor="t">
+              <a:normAutofit lnSpcReduction="10000"/>
+            </a:bodyPr>
+            <a:lstStyle/>
+            <a:p>
+              <a:pPr marL="0" indent="0" algn="l">
+                <a:buNone/>
+              </a:pPr>
+              <a:r>
+                <a:rPr lang="en-US" sz="2400" b="1" dirty="0">
+                  <a:solidFill>
+                    <a:srgbClr val="F0EADB"/>
+                  </a:solidFill>
+                  <a:latin typeface="Noto Sans KR" pitchFamily="34" charset="0"/>
+                  <a:ea typeface="Noto Sans KR" pitchFamily="34" charset="-122"/>
+                  <a:cs typeface="Noto Sans KR" pitchFamily="34" charset="-120"/>
+                </a:rPr>
+                <a:t>AI 엔지니어링 역량</a:t>
+              </a:r>
+              <a:endParaRPr lang="en-US" sz="2400" dirty="0"/>
+            </a:p>
+          </p:txBody>
+        </p:sp>
+        <p:sp>
+          <p:nvSpPr>
+            <p:cNvPr id="20" name="Text 18"/>
+            <p:cNvSpPr/>
+            <p:nvPr/>
+          </p:nvSpPr>
+          <p:spPr>
+            <a:xfrm>
+              <a:off x="12426951" y="3816350"/>
+              <a:ext cx="4722241" cy="698103"/>
+            </a:xfrm>
+            <a:prstGeom prst="rect">
+              <a:avLst/>
+            </a:prstGeom>
+            <a:noFill/>
+            <a:ln/>
+          </p:spPr>
+          <p:txBody>
+            <a:bodyPr wrap="square" lIns="25400" tIns="25400" rIns="25400" bIns="25400" rtlCol="0" anchor="t">
+              <a:normAutofit fontScale="92500" lnSpcReduction="20000"/>
+            </a:bodyPr>
+            <a:lstStyle/>
+            <a:p>
+              <a:pPr marL="0" indent="0" algn="l">
+                <a:lnSpc>
+                  <a:spcPct val="165000"/>
+                </a:lnSpc>
+                <a:buNone/>
+              </a:pPr>
+              <a:r>
+                <a:rPr lang="en-US" sz="1575" dirty="0">
+                  <a:solidFill>
+                    <a:srgbClr val="8A9AB8"/>
+                  </a:solidFill>
+                  <a:latin typeface="Noto Sans KR" pitchFamily="34" charset="0"/>
+                  <a:ea typeface="Noto Sans KR" pitchFamily="34" charset="-122"/>
+                  <a:cs typeface="Noto Sans KR" pitchFamily="34" charset="-120"/>
+                </a:rPr>
+                <a:t>복잡한 전투 디버깅 · AI 에이전트 엔지니어링 경험을 다른 프로젝트에도 그대로 적용</a:t>
+              </a:r>
+              <a:endParaRPr lang="en-US" sz="1575" dirty="0"/>
+            </a:p>
+          </p:txBody>
+        </p:sp>
+      </p:grpSp>
       <p:sp>
         <p:nvSpPr>
           <p:cNvPr id="21" name="Shape 19"/>
